--- a/vorlagen/CASI-Folien.pptx
+++ b/vorlagen/CASI-Folien.pptx
@@ -20,6 +20,11 @@
     <p:embeddedFont>
       <p:font typeface="PP Mori Semibold" pitchFamily="2" charset="0"/>
       <p:regular r:id="rIdCasiFont2"/>
+    </p:embeddedFont>
+    <p:embeddedFont>
+      <p:font typeface="IBM Plex Serif" pitchFamily="2" charset="0"/>
+      <p:regular r:id="rIdCasiFont3"/>
+      <p:italic r:id="rIdCasiFont4"/>
     </p:embeddedFont>
   </p:embeddedFontLst>
   <p:defaultTextStyle>
@@ -628,133 +633,9 @@
           <a:ln/>
         </p:spPr>
       </p:sp>
-      <p:sp>
-        <p:nvSpPr>
-          <p:cNvPr id="3" name="Text 1"/>
-          <p:cNvSpPr/>
-          <p:nvPr>
-            <p:ph idx="101" type="title" hasCustomPrompt="1"/>
-          </p:nvPr>
-        </p:nvSpPr>
-        <p:spPr>
-          <a:xfrm>
-            <a:off x="612648" y="2395728"/>
-            <a:ext cx="2980944" cy="2743200"/>
-          </a:xfrm>
-          <a:prstGeom prst="rect">
-            <a:avLst/>
-          </a:prstGeom>
-          <a:noFill/>
-          <a:ln/>
-        </p:spPr>
-        <p:txBody>
-          <a:bodyPr wrap="square" rtlCol="0"/>
-          <a:lstStyle>
-            <a:lvl1pPr algn="l" indent="0" marL="0">
-              <a:lnSpc>
-                <a:spcPct val="110000"/>
-              </a:lnSpc>
-              <a:buNone/>
-              <a:defRPr lang="en-US" sz="2400" dirty="0">
-                <a:solidFill>
-                  <a:srgbClr val="FFFFFF"/>
-                </a:solidFill>
-                <a:latin typeface="PP Mori Semibold" pitchFamily="34" charset="0"/>
-                <a:ea typeface="PP Mori Semibold" pitchFamily="34" charset="-122"/>
-                <a:cs typeface="PP Mori Semibold" pitchFamily="34" charset="-120"/>
-              </a:defRPr>
-            </a:lvl1pPr>
-          </a:lstStyle>
-          <a:p>
-            <a:pPr algn="l" indent="0" marL="0">
-              <a:lnSpc>
-                <a:spcPct val="110000"/>
-              </a:lnSpc>
-              <a:buNone/>
-            </a:pPr>
-            <a:r>
-              <a:rPr lang="en-US" sz="2400" dirty="0">
-                <a:solidFill>
-                  <a:srgbClr val="FFFFFF"/>
-                </a:solidFill>
-                <a:latin typeface="PP Mori Semibold" pitchFamily="34" charset="0"/>
-                <a:ea typeface="PP Mori Semibold" pitchFamily="34" charset="-122"/>
-                <a:cs typeface="PP Mori Semibold" pitchFamily="34" charset="-120"/>
-              </a:rPr>
-              <a:t>Schlusssatz</a:t>
-            </a:r>
-            <a:endParaRPr lang="en-US" sz="2400" dirty="0"/>
-          </a:p>
-        </p:txBody>
-      </p:sp>
-      <p:sp>
-        <p:nvSpPr>
-          <p:cNvPr id="4" name="Text 1"/>
-          <p:cNvSpPr/>
-          <p:nvPr>
-            <p:ph idx="102" type="body" hasCustomPrompt="1"/>
-          </p:nvPr>
-        </p:nvSpPr>
-        <p:spPr>
-          <a:xfrm>
-            <a:off x="4818888" y="2395728"/>
-            <a:ext cx="6760159" cy="2743200"/>
-          </a:xfrm>
-          <a:prstGeom prst="rect">
-            <a:avLst/>
-          </a:prstGeom>
-          <a:noFill/>
-          <a:ln/>
-        </p:spPr>
-        <p:txBody>
-          <a:bodyPr wrap="square" rtlCol="0"/>
-          <a:lstStyle>
-            <a:lvl1pPr algn="l" indent="0" marL="0">
-              <a:lnSpc>
-                <a:spcPct val="125000"/>
-              </a:lnSpc>
-              <a:spcAft>
-                <a:spcPts val="600"/>
-              </a:spcAft>
-              <a:buNone/>
-              <a:defRPr lang="en-US" sz="1200" dirty="0">
-                <a:solidFill>
-                  <a:srgbClr val="0E4D49"/>
-                </a:solidFill>
-                <a:latin typeface="PP Mori" pitchFamily="34" charset="0"/>
-                <a:ea typeface="PP Mori" pitchFamily="34" charset="-122"/>
-                <a:cs typeface="PP Mori" pitchFamily="34" charset="-120"/>
-              </a:defRPr>
-            </a:lvl1pPr>
-          </a:lstStyle>
-          <a:p>
-            <a:pPr algn="l" indent="0" marL="0">
-              <a:lnSpc>
-                <a:spcPct val="125000"/>
-              </a:lnSpc>
-              <a:spcAft>
-                <a:spcPts val="600"/>
-              </a:spcAft>
-              <a:buNone/>
-            </a:pPr>
-            <a:r>
-              <a:rPr lang="en-US" sz="1200" dirty="0">
-                <a:solidFill>
-                  <a:srgbClr val="0E4D49"/>
-                </a:solidFill>
-                <a:latin typeface="PP Mori" pitchFamily="34" charset="0"/>
-                <a:ea typeface="PP Mori" pitchFamily="34" charset="-122"/>
-                <a:cs typeface="PP Mori" pitchFamily="34" charset="-120"/>
-              </a:rPr>
-              <a:t>Kontakt</a:t>
-            </a:r>
-            <a:endParaRPr lang="en-US" sz="1200" dirty="0"/>
-          </a:p>
-        </p:txBody>
-      </p:sp>
       <p:pic>
         <p:nvPicPr>
-          <p:cNvPr id="5" name="Image 0" descr="Carbon Accounting Standards Initiative">    </p:cNvPr>
+          <p:cNvPr id="3" name="Image 0" descr="CASI">    </p:cNvPr>
           <p:cNvPicPr>
             <a:picLocks noChangeAspect="1"/>
           </p:cNvPicPr>
@@ -768,14 +649,132 @@
         </p:blipFill>
         <p:spPr>
           <a:xfrm>
-            <a:off x="4818888" y="6016752"/>
-            <a:ext cx="1855650" cy="384048"/>
+            <a:off x="612648" y="493776"/>
+            <a:ext cx="450952" cy="502920"/>
           </a:xfrm>
           <a:prstGeom prst="rect">
             <a:avLst/>
           </a:prstGeom>
         </p:spPr>
       </p:pic>
+      <p:sp>
+        <p:nvSpPr>
+          <p:cNvPr id="4" name="Text 1"/>
+          <p:cNvSpPr/>
+          <p:nvPr>
+            <p:ph idx="102" type="title" hasCustomPrompt="1"/>
+          </p:nvPr>
+        </p:nvSpPr>
+        <p:spPr>
+          <a:xfrm>
+            <a:off x="612648" y="2395728"/>
+            <a:ext cx="2980944" cy="2743200"/>
+          </a:xfrm>
+          <a:prstGeom prst="rect">
+            <a:avLst/>
+          </a:prstGeom>
+          <a:noFill/>
+          <a:ln/>
+        </p:spPr>
+        <p:txBody>
+          <a:bodyPr lIns="0" tIns="0" rIns="0" bIns="0" wrap="square" rtlCol="0"/>
+          <a:lstStyle>
+            <a:lvl1pPr algn="l" indent="0" marL="0">
+              <a:lnSpc>
+                <a:spcPct val="110000"/>
+              </a:lnSpc>
+              <a:buNone/>
+              <a:defRPr lang="en-US" sz="2400" dirty="0">
+                <a:solidFill>
+                  <a:srgbClr val="FFFFFF"/>
+                </a:solidFill>
+                <a:latin typeface="PP Mori Semibold" pitchFamily="34" charset="0"/>
+                <a:ea typeface="PP Mori Semibold" pitchFamily="34" charset="-122"/>
+                <a:cs typeface="PP Mori Semibold" pitchFamily="34" charset="-120"/>
+              </a:defRPr>
+            </a:lvl1pPr>
+          </a:lstStyle>
+          <a:p>
+            <a:pPr algn="l" indent="0" marL="0">
+              <a:lnSpc>
+                <a:spcPct val="110000"/>
+              </a:lnSpc>
+              <a:buNone/>
+            </a:pPr>
+            <a:r>
+              <a:rPr lang="en-US" sz="2400" dirty="0">
+                <a:solidFill>
+                  <a:srgbClr val="FFFFFF"/>
+                </a:solidFill>
+                <a:latin typeface="PP Mori Semibold" pitchFamily="34" charset="0"/>
+                <a:ea typeface="PP Mori Semibold" pitchFamily="34" charset="-122"/>
+                <a:cs typeface="PP Mori Semibold" pitchFamily="34" charset="-120"/>
+              </a:rPr>
+              <a:t>Schlusssatz</a:t>
+            </a:r>
+            <a:endParaRPr lang="en-US" sz="2400" dirty="0"/>
+          </a:p>
+        </p:txBody>
+      </p:sp>
+      <p:sp>
+        <p:nvSpPr>
+          <p:cNvPr id="5" name="Text 1"/>
+          <p:cNvSpPr/>
+          <p:nvPr>
+            <p:ph idx="103" type="body" hasCustomPrompt="1"/>
+          </p:nvPr>
+        </p:nvSpPr>
+        <p:spPr>
+          <a:xfrm>
+            <a:off x="4818888" y="2395728"/>
+            <a:ext cx="6760159" cy="2743200"/>
+          </a:xfrm>
+          <a:prstGeom prst="rect">
+            <a:avLst/>
+          </a:prstGeom>
+          <a:noFill/>
+          <a:ln/>
+        </p:spPr>
+        <p:txBody>
+          <a:bodyPr lIns="0" tIns="0" rIns="0" bIns="0" wrap="square" rtlCol="0"/>
+          <a:lstStyle>
+            <a:lvl1pPr algn="l" indent="0" marL="0">
+              <a:lnSpc>
+                <a:spcPct val="135000"/>
+              </a:lnSpc>
+              <a:buNone/>
+              <a:defRPr lang="en-US" sz="1200" dirty="0">
+                <a:solidFill>
+                  <a:srgbClr val="0E4D49"/>
+                </a:solidFill>
+                <a:latin typeface="PP Mori" pitchFamily="34" charset="0"/>
+                <a:ea typeface="PP Mori" pitchFamily="34" charset="-122"/>
+                <a:cs typeface="PP Mori" pitchFamily="34" charset="-120"/>
+              </a:defRPr>
+            </a:lvl1pPr>
+          </a:lstStyle>
+          <a:p>
+            <a:pPr algn="l" indent="0" marL="0">
+              <a:lnSpc>
+                <a:spcPct val="135000"/>
+              </a:lnSpc>
+              <a:buNone/>
+            </a:pPr>
+            <a:r>
+              <a:rPr lang="en-US" sz="1200" dirty="0">
+                <a:solidFill>
+                  <a:srgbClr val="0E4D49"/>
+                </a:solidFill>
+                <a:latin typeface="PP Mori" pitchFamily="34" charset="0"/>
+                <a:ea typeface="PP Mori" pitchFamily="34" charset="-122"/>
+                <a:cs typeface="PP Mori" pitchFamily="34" charset="-120"/>
+              </a:rPr>
+              <a:t>Kontakt</a:t>
+            </a:r>
+            <a:endParaRPr lang="en-US" sz="1200" dirty="0"/>
+          </a:p>
+        </p:txBody>
+      </p:sp>
     </p:spTree>
   </p:cSld>
   <p:clrMapOvr>
@@ -808,6 +807,30 @@
           <a:chExt cx="0" cy="0"/>
         </a:xfrm>
       </p:grpSpPr>
+      <p:pic>
+        <p:nvPicPr>
+          <p:cNvPr id="2" name="Image 0" descr="CASI">    </p:cNvPr>
+          <p:cNvPicPr>
+            <a:picLocks noChangeAspect="1"/>
+          </p:cNvPicPr>
+          <p:nvPr/>
+        </p:nvPicPr>
+        <p:blipFill>
+          <a:blip r:embed="rId1"/>
+          <a:stretch>
+            <a:fillRect/>
+          </a:stretch>
+        </p:blipFill>
+        <p:spPr>
+          <a:xfrm>
+            <a:off x="612648" y="6437376"/>
+            <a:ext cx="163982" cy="182880"/>
+          </a:xfrm>
+          <a:prstGeom prst="rect">
+            <a:avLst/>
+          </a:prstGeom>
+        </p:spPr>
+      </p:pic>
       <p:sp>
         <p:nvSpPr>
           <p:cNvPr id="25" name="Slide Number Placeholder 0"/>
@@ -890,7 +913,7 @@
       </p:grpSpPr>
       <p:pic>
         <p:nvPicPr>
-          <p:cNvPr id="2" name="Image 0" descr="Carbon Accounting Standards Initiative">    </p:cNvPr>
+          <p:cNvPr id="2" name="Image 0" descr="CASI">    </p:cNvPr>
           <p:cNvPicPr>
             <a:picLocks noChangeAspect="1"/>
           </p:cNvPicPr>
@@ -905,7 +928,7 @@
         <p:spPr>
           <a:xfrm>
             <a:off x="612648" y="493776"/>
-            <a:ext cx="1855650" cy="384048"/>
+            <a:ext cx="450952" cy="502920"/>
           </a:xfrm>
           <a:prstGeom prst="rect">
             <a:avLst/>
@@ -932,15 +955,12 @@
           <a:ln/>
         </p:spPr>
         <p:txBody>
-          <a:bodyPr wrap="square" rtlCol="0"/>
+          <a:bodyPr lIns="0" tIns="0" rIns="0" bIns="0" wrap="square" rtlCol="0"/>
           <a:lstStyle>
             <a:lvl1pPr algn="l" indent="0" marL="0">
               <a:lnSpc>
-                <a:spcPct val="125000"/>
+                <a:spcPct val="120000"/>
               </a:lnSpc>
-              <a:spcAft>
-                <a:spcPts val="600"/>
-              </a:spcAft>
               <a:buNone/>
               <a:defRPr lang="en-US" sz="1000" spc="100" kern="0" dirty="0">
                 <a:solidFill>
@@ -955,11 +975,8 @@
           <a:p>
             <a:pPr algn="l" indent="0" marL="0">
               <a:lnSpc>
-                <a:spcPct val="125000"/>
+                <a:spcPct val="120000"/>
               </a:lnSpc>
-              <a:spcAft>
-                <a:spcPts val="600"/>
-              </a:spcAft>
               <a:buNone/>
             </a:pPr>
             <a:r>
@@ -997,7 +1014,7 @@
           <a:ln/>
         </p:spPr>
         <p:txBody>
-          <a:bodyPr wrap="square" rtlCol="0"/>
+          <a:bodyPr lIns="0" tIns="0" rIns="0" bIns="0" wrap="square" rtlCol="0"/>
           <a:lstStyle>
             <a:lvl1pPr algn="l" indent="0" marL="0">
               <a:lnSpc>
@@ -1056,15 +1073,12 @@
           <a:ln/>
         </p:spPr>
         <p:txBody>
-          <a:bodyPr wrap="square" rtlCol="0"/>
+          <a:bodyPr lIns="0" tIns="0" rIns="0" bIns="0" wrap="square" rtlCol="0"/>
           <a:lstStyle>
             <a:lvl1pPr algn="l" indent="0" marL="0">
               <a:lnSpc>
-                <a:spcPct val="125000"/>
+                <a:spcPct val="120000"/>
               </a:lnSpc>
-              <a:spcAft>
-                <a:spcPts val="600"/>
-              </a:spcAft>
               <a:buNone/>
               <a:defRPr lang="en-US" sz="1400" dirty="0">
                 <a:solidFill>
@@ -1079,11 +1093,8 @@
           <a:p>
             <a:pPr algn="l" indent="0" marL="0">
               <a:lnSpc>
-                <a:spcPct val="125000"/>
+                <a:spcPct val="120000"/>
               </a:lnSpc>
-              <a:spcAft>
-                <a:spcPts val="600"/>
-              </a:spcAft>
               <a:buNone/>
             </a:pPr>
             <a:r>
@@ -1121,15 +1132,12 @@
           <a:ln/>
         </p:spPr>
         <p:txBody>
-          <a:bodyPr wrap="square" rtlCol="0"/>
+          <a:bodyPr lIns="0" tIns="0" rIns="0" bIns="0" wrap="square" rtlCol="0"/>
           <a:lstStyle>
             <a:lvl1pPr algn="l" indent="0" marL="0">
               <a:lnSpc>
-                <a:spcPct val="125000"/>
+                <a:spcPct val="120000"/>
               </a:lnSpc>
-              <a:spcAft>
-                <a:spcPts val="600"/>
-              </a:spcAft>
               <a:buNone/>
               <a:defRPr lang="en-US" sz="900" dirty="0">
                 <a:solidFill>
@@ -1144,11 +1152,8 @@
           <a:p>
             <a:pPr algn="l" indent="0" marL="0">
               <a:lnSpc>
-                <a:spcPct val="125000"/>
+                <a:spcPct val="120000"/>
               </a:lnSpc>
-              <a:spcAft>
-                <a:spcPts val="600"/>
-              </a:spcAft>
               <a:buNone/>
             </a:pPr>
             <a:r>
@@ -1198,12 +1203,36 @@
           <a:chExt cx="0" cy="0"/>
         </a:xfrm>
       </p:grpSpPr>
-      <p:sp>
-        <p:nvSpPr>
-          <p:cNvPr id="2" name="Text 0"/>
+      <p:pic>
+        <p:nvPicPr>
+          <p:cNvPr id="2" name="Image 0" descr="CASI">    </p:cNvPr>
+          <p:cNvPicPr>
+            <a:picLocks noChangeAspect="1"/>
+          </p:cNvPicPr>
+          <p:nvPr/>
+        </p:nvPicPr>
+        <p:blipFill>
+          <a:blip r:embed="rId1"/>
+          <a:stretch>
+            <a:fillRect/>
+          </a:stretch>
+        </p:blipFill>
+        <p:spPr>
+          <a:xfrm>
+            <a:off x="612648" y="6437376"/>
+            <a:ext cx="163982" cy="182880"/>
+          </a:xfrm>
+          <a:prstGeom prst="rect">
+            <a:avLst/>
+          </a:prstGeom>
+        </p:spPr>
+      </p:pic>
+      <p:sp>
+        <p:nvSpPr>
+          <p:cNvPr id="3" name="Text 0"/>
           <p:cNvSpPr/>
           <p:nvPr>
-            <p:ph idx="100" type="body" hasCustomPrompt="1"/>
+            <p:ph idx="101" type="body" hasCustomPrompt="1"/>
           </p:nvPr>
         </p:nvSpPr>
         <p:spPr>
@@ -1218,15 +1247,12 @@
           <a:ln/>
         </p:spPr>
         <p:txBody>
-          <a:bodyPr wrap="square" rtlCol="0"/>
+          <a:bodyPr lIns="0" tIns="0" rIns="0" bIns="0" wrap="square" rtlCol="0"/>
           <a:lstStyle>
             <a:lvl1pPr algn="l" indent="0" marL="0">
               <a:lnSpc>
-                <a:spcPct val="125000"/>
+                <a:spcPct val="120000"/>
               </a:lnSpc>
-              <a:spcAft>
-                <a:spcPts val="600"/>
-              </a:spcAft>
               <a:buNone/>
               <a:defRPr lang="en-US" sz="1000" dirty="0">
                 <a:solidFill>
@@ -1241,11 +1267,8 @@
           <a:p>
             <a:pPr algn="l" indent="0" marL="0">
               <a:lnSpc>
-                <a:spcPct val="125000"/>
+                <a:spcPct val="120000"/>
               </a:lnSpc>
-              <a:spcAft>
-                <a:spcPts val="600"/>
-              </a:spcAft>
               <a:buNone/>
             </a:pPr>
             <a:r>
@@ -1265,10 +1288,10 @@
       </p:sp>
       <p:sp>
         <p:nvSpPr>
-          <p:cNvPr id="3" name="Text 0"/>
+          <p:cNvPr id="4" name="Text 0"/>
           <p:cNvSpPr/>
           <p:nvPr>
-            <p:ph idx="101" type="title" hasCustomPrompt="1"/>
+            <p:ph idx="102" type="title" hasCustomPrompt="1"/>
           </p:nvPr>
         </p:nvSpPr>
         <p:spPr>
@@ -1283,7 +1306,7 @@
           <a:ln/>
         </p:spPr>
         <p:txBody>
-          <a:bodyPr wrap="square" rtlCol="0"/>
+          <a:bodyPr lIns="0" tIns="0" rIns="0" bIns="0" wrap="square" rtlCol="0"/>
           <a:lstStyle>
             <a:lvl1pPr algn="l" indent="0" marL="0">
               <a:lnSpc>
@@ -1402,12 +1425,36 @@
           <a:chExt cx="0" cy="0"/>
         </a:xfrm>
       </p:grpSpPr>
-      <p:sp>
-        <p:nvSpPr>
-          <p:cNvPr id="2" name="Text 0"/>
+      <p:pic>
+        <p:nvPicPr>
+          <p:cNvPr id="2" name="Image 0" descr="CASI">    </p:cNvPr>
+          <p:cNvPicPr>
+            <a:picLocks noChangeAspect="1"/>
+          </p:cNvPicPr>
+          <p:nvPr/>
+        </p:nvPicPr>
+        <p:blipFill>
+          <a:blip r:embed="rId1"/>
+          <a:stretch>
+            <a:fillRect/>
+          </a:stretch>
+        </p:blipFill>
+        <p:spPr>
+          <a:xfrm>
+            <a:off x="612648" y="6437376"/>
+            <a:ext cx="163982" cy="182880"/>
+          </a:xfrm>
+          <a:prstGeom prst="rect">
+            <a:avLst/>
+          </a:prstGeom>
+        </p:spPr>
+      </p:pic>
+      <p:sp>
+        <p:nvSpPr>
+          <p:cNvPr id="3" name="Text 0"/>
           <p:cNvSpPr/>
           <p:nvPr>
-            <p:ph idx="100" type="title" hasCustomPrompt="1"/>
+            <p:ph idx="101" type="title" hasCustomPrompt="1"/>
           </p:nvPr>
         </p:nvSpPr>
         <p:spPr>
@@ -1422,7 +1469,7 @@
           <a:ln/>
         </p:spPr>
         <p:txBody>
-          <a:bodyPr wrap="square" rtlCol="0"/>
+          <a:bodyPr lIns="0" tIns="0" rIns="0" bIns="0" wrap="square" rtlCol="0"/>
           <a:lstStyle>
             <a:lvl1pPr algn="l" indent="0" marL="0">
               <a:buNone/>
@@ -1457,10 +1504,10 @@
       </p:sp>
       <p:sp>
         <p:nvSpPr>
-          <p:cNvPr id="3" name="Text 0"/>
+          <p:cNvPr id="4" name="Text 0"/>
           <p:cNvSpPr/>
           <p:nvPr>
-            <p:ph idx="101" type="body" hasCustomPrompt="1"/>
+            <p:ph idx="102" type="body" hasCustomPrompt="1"/>
           </p:nvPr>
         </p:nvSpPr>
         <p:spPr>
@@ -1475,11 +1522,11 @@
           <a:ln/>
         </p:spPr>
         <p:txBody>
-          <a:bodyPr wrap="square" rtlCol="0"/>
+          <a:bodyPr lIns="0" tIns="0" rIns="0" bIns="0" wrap="square" rtlCol="0"/>
           <a:lstStyle>
             <a:lvl1pPr algn="l" indent="0" marL="0">
               <a:lnSpc>
-                <a:spcPct val="125000"/>
+                <a:spcPct val="135000"/>
               </a:lnSpc>
               <a:spcAft>
                 <a:spcPts val="600"/>
@@ -1489,16 +1536,16 @@
                 <a:solidFill>
                   <a:srgbClr val="0E4D49"/>
                 </a:solidFill>
-                <a:latin typeface="PP Mori" pitchFamily="34" charset="0"/>
-                <a:ea typeface="PP Mori" pitchFamily="34" charset="-122"/>
-                <a:cs typeface="PP Mori" pitchFamily="34" charset="-120"/>
+                <a:latin typeface="IBM Plex Serif" pitchFamily="34" charset="0"/>
+                <a:ea typeface="IBM Plex Serif" pitchFamily="34" charset="-122"/>
+                <a:cs typeface="IBM Plex Serif" pitchFamily="34" charset="-120"/>
               </a:defRPr>
             </a:lvl1pPr>
           </a:lstStyle>
           <a:p>
             <a:pPr algn="l" indent="0" marL="0">
               <a:lnSpc>
-                <a:spcPct val="125000"/>
+                <a:spcPct val="135000"/>
               </a:lnSpc>
               <a:spcAft>
                 <a:spcPts val="600"/>
@@ -1510,9 +1557,9 @@
                 <a:solidFill>
                   <a:srgbClr val="0E4D49"/>
                 </a:solidFill>
-                <a:latin typeface="PP Mori" pitchFamily="34" charset="0"/>
-                <a:ea typeface="PP Mori" pitchFamily="34" charset="-122"/>
-                <a:cs typeface="PP Mori" pitchFamily="34" charset="-120"/>
+                <a:latin typeface="IBM Plex Serif" pitchFamily="34" charset="0"/>
+                <a:ea typeface="IBM Plex Serif" pitchFamily="34" charset="-122"/>
+                <a:cs typeface="IBM Plex Serif" pitchFamily="34" charset="-120"/>
               </a:rPr>
               <a:t>Text hinzufügen</a:t>
             </a:r>
@@ -1600,12 +1647,36 @@
           <a:chExt cx="0" cy="0"/>
         </a:xfrm>
       </p:grpSpPr>
-      <p:sp>
-        <p:nvSpPr>
-          <p:cNvPr id="2" name="Text 0"/>
+      <p:pic>
+        <p:nvPicPr>
+          <p:cNvPr id="2" name="Image 0" descr="CASI">    </p:cNvPr>
+          <p:cNvPicPr>
+            <a:picLocks noChangeAspect="1"/>
+          </p:cNvPicPr>
+          <p:nvPr/>
+        </p:nvPicPr>
+        <p:blipFill>
+          <a:blip r:embed="rId1"/>
+          <a:stretch>
+            <a:fillRect/>
+          </a:stretch>
+        </p:blipFill>
+        <p:spPr>
+          <a:xfrm>
+            <a:off x="612648" y="6437376"/>
+            <a:ext cx="163982" cy="182880"/>
+          </a:xfrm>
+          <a:prstGeom prst="rect">
+            <a:avLst/>
+          </a:prstGeom>
+        </p:spPr>
+      </p:pic>
+      <p:sp>
+        <p:nvSpPr>
+          <p:cNvPr id="3" name="Text 0"/>
           <p:cNvSpPr/>
           <p:nvPr>
-            <p:ph idx="100" type="title" hasCustomPrompt="1"/>
+            <p:ph idx="101" type="title" hasCustomPrompt="1"/>
           </p:nvPr>
         </p:nvSpPr>
         <p:spPr>
@@ -1620,7 +1691,7 @@
           <a:ln/>
         </p:spPr>
         <p:txBody>
-          <a:bodyPr wrap="square" rtlCol="0"/>
+          <a:bodyPr lIns="0" tIns="0" rIns="0" bIns="0" wrap="square" rtlCol="0"/>
           <a:lstStyle>
             <a:lvl1pPr algn="l" indent="0" marL="0">
               <a:buNone/>
@@ -1733,12 +1804,36 @@
           <a:chExt cx="0" cy="0"/>
         </a:xfrm>
       </p:grpSpPr>
-      <p:sp>
-        <p:nvSpPr>
-          <p:cNvPr id="2" name="Text 0"/>
+      <p:pic>
+        <p:nvPicPr>
+          <p:cNvPr id="2" name="Image 0" descr="CASI">    </p:cNvPr>
+          <p:cNvPicPr>
+            <a:picLocks noChangeAspect="1"/>
+          </p:cNvPicPr>
+          <p:nvPr/>
+        </p:nvPicPr>
+        <p:blipFill>
+          <a:blip r:embed="rId1"/>
+          <a:stretch>
+            <a:fillRect/>
+          </a:stretch>
+        </p:blipFill>
+        <p:spPr>
+          <a:xfrm>
+            <a:off x="612648" y="6437376"/>
+            <a:ext cx="163982" cy="182880"/>
+          </a:xfrm>
+          <a:prstGeom prst="rect">
+            <a:avLst/>
+          </a:prstGeom>
+        </p:spPr>
+      </p:pic>
+      <p:sp>
+        <p:nvSpPr>
+          <p:cNvPr id="3" name="Text 0"/>
           <p:cNvSpPr/>
           <p:nvPr>
-            <p:ph idx="100" type="title" hasCustomPrompt="1"/>
+            <p:ph idx="101" type="title" hasCustomPrompt="1"/>
           </p:nvPr>
         </p:nvSpPr>
         <p:spPr>
@@ -1753,7 +1848,7 @@
           <a:ln/>
         </p:spPr>
         <p:txBody>
-          <a:bodyPr wrap="square" rtlCol="0"/>
+          <a:bodyPr lIns="0" tIns="0" rIns="0" bIns="0" wrap="square" rtlCol="0"/>
           <a:lstStyle>
             <a:lvl1pPr algn="l" indent="0" marL="0">
               <a:buNone/>
@@ -1788,10 +1883,10 @@
       </p:sp>
       <p:sp>
         <p:nvSpPr>
-          <p:cNvPr id="3" name="Text 0"/>
+          <p:cNvPr id="4" name="Text 0"/>
           <p:cNvSpPr/>
           <p:nvPr>
-            <p:ph idx="101" type="body" hasCustomPrompt="1"/>
+            <p:ph idx="102" type="body" hasCustomPrompt="1"/>
           </p:nvPr>
         </p:nvSpPr>
         <p:spPr>
@@ -1806,11 +1901,11 @@
           <a:ln/>
         </p:spPr>
         <p:txBody>
-          <a:bodyPr wrap="square" rtlCol="0"/>
+          <a:bodyPr lIns="0" tIns="0" rIns="0" bIns="0" wrap="square" rtlCol="0"/>
           <a:lstStyle>
             <a:lvl1pPr algn="l" indent="0" marL="0">
               <a:lnSpc>
-                <a:spcPct val="125000"/>
+                <a:spcPct val="135000"/>
               </a:lnSpc>
               <a:spcAft>
                 <a:spcPts val="600"/>
@@ -1820,16 +1915,16 @@
                 <a:solidFill>
                   <a:srgbClr val="0E4D49"/>
                 </a:solidFill>
-                <a:latin typeface="PP Mori" pitchFamily="34" charset="0"/>
-                <a:ea typeface="PP Mori" pitchFamily="34" charset="-122"/>
-                <a:cs typeface="PP Mori" pitchFamily="34" charset="-120"/>
+                <a:latin typeface="IBM Plex Serif" pitchFamily="34" charset="0"/>
+                <a:ea typeface="IBM Plex Serif" pitchFamily="34" charset="-122"/>
+                <a:cs typeface="IBM Plex Serif" pitchFamily="34" charset="-120"/>
               </a:defRPr>
             </a:lvl1pPr>
           </a:lstStyle>
           <a:p>
             <a:pPr algn="l" indent="0" marL="0">
               <a:lnSpc>
-                <a:spcPct val="125000"/>
+                <a:spcPct val="135000"/>
               </a:lnSpc>
               <a:spcAft>
                 <a:spcPts val="600"/>
@@ -1841,9 +1936,9 @@
                 <a:solidFill>
                   <a:srgbClr val="0E4D49"/>
                 </a:solidFill>
-                <a:latin typeface="PP Mori" pitchFamily="34" charset="0"/>
-                <a:ea typeface="PP Mori" pitchFamily="34" charset="-122"/>
-                <a:cs typeface="PP Mori" pitchFamily="34" charset="-120"/>
+                <a:latin typeface="IBM Plex Serif" pitchFamily="34" charset="0"/>
+                <a:ea typeface="IBM Plex Serif" pitchFamily="34" charset="-122"/>
+                <a:cs typeface="IBM Plex Serif" pitchFamily="34" charset="-120"/>
               </a:rPr>
               <a:t>Text hinzufügen</a:t>
             </a:r>
@@ -1853,10 +1948,10 @@
       </p:sp>
       <p:sp>
         <p:nvSpPr>
-          <p:cNvPr id="4" name="Text 0"/>
+          <p:cNvPr id="5" name="Text 0"/>
           <p:cNvSpPr/>
           <p:nvPr>
-            <p:ph idx="102" type="body" hasCustomPrompt="1"/>
+            <p:ph idx="103" type="body" hasCustomPrompt="1"/>
           </p:nvPr>
         </p:nvSpPr>
         <p:spPr>
@@ -1871,11 +1966,11 @@
           <a:ln/>
         </p:spPr>
         <p:txBody>
-          <a:bodyPr wrap="square" rtlCol="0"/>
+          <a:bodyPr lIns="0" tIns="0" rIns="0" bIns="0" wrap="square" rtlCol="0"/>
           <a:lstStyle>
             <a:lvl1pPr algn="l" indent="0" marL="0">
               <a:lnSpc>
-                <a:spcPct val="125000"/>
+                <a:spcPct val="135000"/>
               </a:lnSpc>
               <a:spcAft>
                 <a:spcPts val="600"/>
@@ -1885,16 +1980,16 @@
                 <a:solidFill>
                   <a:srgbClr val="0E4D49"/>
                 </a:solidFill>
-                <a:latin typeface="PP Mori" pitchFamily="34" charset="0"/>
-                <a:ea typeface="PP Mori" pitchFamily="34" charset="-122"/>
-                <a:cs typeface="PP Mori" pitchFamily="34" charset="-120"/>
+                <a:latin typeface="IBM Plex Serif" pitchFamily="34" charset="0"/>
+                <a:ea typeface="IBM Plex Serif" pitchFamily="34" charset="-122"/>
+                <a:cs typeface="IBM Plex Serif" pitchFamily="34" charset="-120"/>
               </a:defRPr>
             </a:lvl1pPr>
           </a:lstStyle>
           <a:p>
             <a:pPr algn="l" indent="0" marL="0">
               <a:lnSpc>
-                <a:spcPct val="125000"/>
+                <a:spcPct val="135000"/>
               </a:lnSpc>
               <a:spcAft>
                 <a:spcPts val="600"/>
@@ -1906,9 +2001,9 @@
                 <a:solidFill>
                   <a:srgbClr val="0E4D49"/>
                 </a:solidFill>
-                <a:latin typeface="PP Mori" pitchFamily="34" charset="0"/>
-                <a:ea typeface="PP Mori" pitchFamily="34" charset="-122"/>
-                <a:cs typeface="PP Mori" pitchFamily="34" charset="-120"/>
+                <a:latin typeface="IBM Plex Serif" pitchFamily="34" charset="0"/>
+                <a:ea typeface="IBM Plex Serif" pitchFamily="34" charset="-122"/>
+                <a:cs typeface="IBM Plex Serif" pitchFamily="34" charset="-120"/>
               </a:rPr>
               <a:t>Text hinzufügen</a:t>
             </a:r>
@@ -1974,7 +2069,7 @@
 
 <file path=ppt/slideLayouts/slideLayout7.xml><?xml version="1.0" encoding="utf-8"?>
 <p:sldLayout xmlns:a="http://schemas.openxmlformats.org/drawingml/2006/main" xmlns:r="http://schemas.openxmlformats.org/officeDocument/2006/relationships" xmlns:p="http://schemas.openxmlformats.org/presentationml/2006/main" preserve="1">
-  <p:cSld name="Box">
+  <p:cSld name="Text mit Box">
     <p:bg>
       <p:bgPr>
         <a:solidFill>
@@ -1996,12 +2091,36 @@
           <a:chExt cx="0" cy="0"/>
         </a:xfrm>
       </p:grpSpPr>
-      <p:sp>
-        <p:nvSpPr>
-          <p:cNvPr id="2" name="Text 0"/>
+      <p:pic>
+        <p:nvPicPr>
+          <p:cNvPr id="2" name="Image 0" descr="CASI">    </p:cNvPr>
+          <p:cNvPicPr>
+            <a:picLocks noChangeAspect="1"/>
+          </p:cNvPicPr>
+          <p:nvPr/>
+        </p:nvPicPr>
+        <p:blipFill>
+          <a:blip r:embed="rId1"/>
+          <a:stretch>
+            <a:fillRect/>
+          </a:stretch>
+        </p:blipFill>
+        <p:spPr>
+          <a:xfrm>
+            <a:off x="612648" y="6437376"/>
+            <a:ext cx="163982" cy="182880"/>
+          </a:xfrm>
+          <a:prstGeom prst="rect">
+            <a:avLst/>
+          </a:prstGeom>
+        </p:spPr>
+      </p:pic>
+      <p:sp>
+        <p:nvSpPr>
+          <p:cNvPr id="3" name="Text 0"/>
           <p:cNvSpPr/>
           <p:nvPr>
-            <p:ph idx="100" type="title" hasCustomPrompt="1"/>
+            <p:ph idx="101" type="title" hasCustomPrompt="1"/>
           </p:nvPr>
         </p:nvSpPr>
         <p:spPr>
@@ -2016,7 +2135,7 @@
           <a:ln/>
         </p:spPr>
         <p:txBody>
-          <a:bodyPr wrap="square" rtlCol="0"/>
+          <a:bodyPr lIns="0" tIns="0" rIns="0" bIns="0" wrap="square" rtlCol="0"/>
           <a:lstStyle>
             <a:lvl1pPr algn="l" indent="0" marL="0">
               <a:buNone/>
@@ -2051,48 +2170,16 @@
       </p:sp>
       <p:sp>
         <p:nvSpPr>
-          <p:cNvPr id="3" name="Text 0"/>
+          <p:cNvPr id="4" name="Text 0"/>
           <p:cNvSpPr/>
-          <p:nvPr/>
+          <p:nvPr>
+            <p:ph idx="102" type="body" hasCustomPrompt="1"/>
+          </p:nvPr>
         </p:nvSpPr>
         <p:spPr>
           <a:xfrm>
             <a:off x="612648" y="960120"/>
-            <a:ext cx="10966399" cy="5440680"/>
-          </a:xfrm>
-          <a:prstGeom prst="roundRect">
-            <a:avLst>
-              <a:gd name="adj" fmla="val 1681"/>
-            </a:avLst>
-          </a:prstGeom>
-          <a:solidFill>
-            <a:srgbClr val="EEF2F1"/>
-          </a:solidFill>
-          <a:ln/>
-        </p:spPr>
-        <p:txBody>
-          <a:bodyPr wrap="square" rtlCol="0" anchor="ctr"/>
-          <a:lstStyle/>
-          <a:p>
-            <a:pPr indent="0" marL="0">
-              <a:buNone/>
-            </a:pPr>
-            <a:endParaRPr lang="en-US" dirty="0"/>
-          </a:p>
-        </p:txBody>
-      </p:sp>
-      <p:sp>
-        <p:nvSpPr>
-          <p:cNvPr id="4" name="Text 1"/>
-          <p:cNvSpPr/>
-          <p:nvPr>
-            <p:ph idx="102" type="body" hasCustomPrompt="1"/>
-          </p:nvPr>
-        </p:nvSpPr>
-        <p:spPr>
-          <a:xfrm>
-            <a:off x="886968" y="1234440"/>
-            <a:ext cx="10417759" cy="4892040"/>
+            <a:ext cx="6760159" cy="5440680"/>
           </a:xfrm>
           <a:prstGeom prst="rect">
             <a:avLst/>
@@ -2101,11 +2188,11 @@
           <a:ln/>
         </p:spPr>
         <p:txBody>
-          <a:bodyPr wrap="square" rtlCol="0"/>
+          <a:bodyPr lIns="0" tIns="0" rIns="0" bIns="0" wrap="square" rtlCol="0"/>
           <a:lstStyle>
             <a:lvl1pPr algn="l" indent="0" marL="0">
               <a:lnSpc>
-                <a:spcPct val="125000"/>
+                <a:spcPct val="135000"/>
               </a:lnSpc>
               <a:spcAft>
                 <a:spcPts val="600"/>
@@ -2115,16 +2202,16 @@
                 <a:solidFill>
                   <a:srgbClr val="0E4D49"/>
                 </a:solidFill>
-                <a:latin typeface="PP Mori" pitchFamily="34" charset="0"/>
-                <a:ea typeface="PP Mori" pitchFamily="34" charset="-122"/>
-                <a:cs typeface="PP Mori" pitchFamily="34" charset="-120"/>
+                <a:latin typeface="IBM Plex Serif" pitchFamily="34" charset="0"/>
+                <a:ea typeface="IBM Plex Serif" pitchFamily="34" charset="-122"/>
+                <a:cs typeface="IBM Plex Serif" pitchFamily="34" charset="-120"/>
               </a:defRPr>
             </a:lvl1pPr>
           </a:lstStyle>
           <a:p>
             <a:pPr algn="l" indent="0" marL="0">
               <a:lnSpc>
-                <a:spcPct val="125000"/>
+                <a:spcPct val="135000"/>
               </a:lnSpc>
               <a:spcAft>
                 <a:spcPts val="600"/>
@@ -2136,11 +2223,84 @@
                 <a:solidFill>
                   <a:srgbClr val="0E4D49"/>
                 </a:solidFill>
-                <a:latin typeface="PP Mori" pitchFamily="34" charset="0"/>
-                <a:ea typeface="PP Mori" pitchFamily="34" charset="-122"/>
-                <a:cs typeface="PP Mori" pitchFamily="34" charset="-120"/>
+                <a:latin typeface="IBM Plex Serif" pitchFamily="34" charset="0"/>
+                <a:ea typeface="IBM Plex Serif" pitchFamily="34" charset="-122"/>
+                <a:cs typeface="IBM Plex Serif" pitchFamily="34" charset="-120"/>
               </a:rPr>
               <a:t>Text hinzufügen</a:t>
+            </a:r>
+            <a:endParaRPr lang="en-US" sz="1200" dirty="0"/>
+          </a:p>
+        </p:txBody>
+      </p:sp>
+      <p:sp>
+        <p:nvSpPr>
+          <p:cNvPr id="5" name="Text 0"/>
+          <p:cNvSpPr/>
+          <p:nvPr>
+            <p:ph idx="103" type="body" hasCustomPrompt="1"/>
+          </p:nvPr>
+        </p:nvSpPr>
+        <p:spPr>
+          <a:xfrm>
+            <a:off x="7738567" y="960120"/>
+            <a:ext cx="3840480" cy="1097280"/>
+          </a:xfrm>
+          <a:prstGeom prst="roundRect">
+            <a:avLst>
+              <a:gd name="adj" fmla="val 4000"/>
+            </a:avLst>
+          </a:prstGeom>
+          <a:solidFill>
+            <a:srgbClr val="EEF2F1"/>
+          </a:solidFill>
+          <a:ln>
+            <a:noFill/>
+          </a:ln>
+        </p:spPr>
+        <p:txBody>
+          <a:bodyPr wrap="square" rtlCol="0" lIns="274320" tIns="274320" rIns="274320" bIns="274320">
+            <a:spAutoFit/>
+          </a:bodyPr>
+          <a:lstStyle>
+            <a:lvl1pPr algn="l" indent="0" marL="0">
+              <a:lnSpc>
+                <a:spcPct val="135000"/>
+              </a:lnSpc>
+              <a:spcAft>
+                <a:spcPts val="600"/>
+              </a:spcAft>
+              <a:buNone/>
+              <a:defRPr lang="en-US" sz="1200" dirty="0">
+                <a:solidFill>
+                  <a:srgbClr val="0E4D49"/>
+                </a:solidFill>
+                <a:latin typeface="IBM Plex Serif" pitchFamily="34" charset="0"/>
+                <a:ea typeface="IBM Plex Serif" pitchFamily="34" charset="-122"/>
+                <a:cs typeface="IBM Plex Serif" pitchFamily="34" charset="-120"/>
+              </a:defRPr>
+            </a:lvl1pPr>
+          </a:lstStyle>
+          <a:p>
+            <a:pPr algn="l" indent="0" marL="0">
+              <a:lnSpc>
+                <a:spcPct val="135000"/>
+              </a:lnSpc>
+              <a:spcAft>
+                <a:spcPts val="600"/>
+              </a:spcAft>
+              <a:buNone/>
+            </a:pPr>
+            <a:r>
+              <a:rPr lang="en-US" sz="1200" dirty="0">
+                <a:solidFill>
+                  <a:srgbClr val="0E4D49"/>
+                </a:solidFill>
+                <a:latin typeface="IBM Plex Serif" pitchFamily="34" charset="0"/>
+                <a:ea typeface="IBM Plex Serif" pitchFamily="34" charset="-122"/>
+                <a:cs typeface="IBM Plex Serif" pitchFamily="34" charset="-120"/>
+              </a:rPr>
+              <a:t>Text in der Box</a:t>
             </a:r>
             <a:endParaRPr lang="en-US" sz="1200" dirty="0"/>
           </a:p>
@@ -2226,12 +2386,36 @@
           <a:chExt cx="0" cy="0"/>
         </a:xfrm>
       </p:grpSpPr>
-      <p:sp>
-        <p:nvSpPr>
-          <p:cNvPr id="2" name="Text 0"/>
+      <p:pic>
+        <p:nvPicPr>
+          <p:cNvPr id="2" name="Image 0" descr="CASI">    </p:cNvPr>
+          <p:cNvPicPr>
+            <a:picLocks noChangeAspect="1"/>
+          </p:cNvPicPr>
+          <p:nvPr/>
+        </p:nvPicPr>
+        <p:blipFill>
+          <a:blip r:embed="rId1"/>
+          <a:stretch>
+            <a:fillRect/>
+          </a:stretch>
+        </p:blipFill>
+        <p:spPr>
+          <a:xfrm>
+            <a:off x="612648" y="6437376"/>
+            <a:ext cx="163982" cy="182880"/>
+          </a:xfrm>
+          <a:prstGeom prst="rect">
+            <a:avLst/>
+          </a:prstGeom>
+        </p:spPr>
+      </p:pic>
+      <p:sp>
+        <p:nvSpPr>
+          <p:cNvPr id="3" name="Text 0"/>
           <p:cNvSpPr/>
           <p:nvPr>
-            <p:ph idx="100" type="title" hasCustomPrompt="1"/>
+            <p:ph idx="101" type="title" hasCustomPrompt="1"/>
           </p:nvPr>
         </p:nvSpPr>
         <p:spPr>
@@ -2246,7 +2430,7 @@
           <a:ln/>
         </p:spPr>
         <p:txBody>
-          <a:bodyPr wrap="square" rtlCol="0"/>
+          <a:bodyPr lIns="0" tIns="0" rIns="0" bIns="0" wrap="square" rtlCol="0"/>
           <a:lstStyle>
             <a:lvl1pPr algn="l" indent="0" marL="0">
               <a:buNone/>
@@ -2281,93 +2465,37 @@
       </p:sp>
       <p:sp>
         <p:nvSpPr>
-          <p:cNvPr id="3" name="Text 0"/>
+          <p:cNvPr id="4" name="Text 0"/>
           <p:cNvSpPr/>
-          <p:nvPr/>
+          <p:nvPr>
+            <p:ph idx="102" type="body" hasCustomPrompt="1"/>
+          </p:nvPr>
         </p:nvSpPr>
         <p:spPr>
           <a:xfrm>
             <a:off x="612648" y="960120"/>
-            <a:ext cx="5300320" cy="5440680"/>
+            <a:ext cx="5300320" cy="1097280"/>
           </a:xfrm>
           <a:prstGeom prst="roundRect">
             <a:avLst>
-              <a:gd name="adj" fmla="val 1725"/>
+              <a:gd name="adj" fmla="val 4000"/>
             </a:avLst>
           </a:prstGeom>
           <a:solidFill>
             <a:srgbClr val="EEF2F1"/>
           </a:solidFill>
-          <a:ln/>
-        </p:spPr>
-        <p:txBody>
-          <a:bodyPr wrap="square" rtlCol="0" anchor="ctr"/>
-          <a:lstStyle/>
-          <a:p>
-            <a:pPr indent="0" marL="0">
-              <a:buNone/>
-            </a:pPr>
-            <a:endParaRPr lang="en-US" dirty="0"/>
-          </a:p>
-        </p:txBody>
-      </p:sp>
-      <p:sp>
-        <p:nvSpPr>
-          <p:cNvPr id="4" name="Text 1"/>
-          <p:cNvSpPr/>
-          <p:nvPr/>
-        </p:nvSpPr>
-        <p:spPr>
-          <a:xfrm>
-            <a:off x="6278728" y="960120"/>
-            <a:ext cx="5300320" cy="5440680"/>
-          </a:xfrm>
-          <a:prstGeom prst="roundRect">
-            <a:avLst>
-              <a:gd name="adj" fmla="val 1725"/>
-            </a:avLst>
-          </a:prstGeom>
-          <a:solidFill>
-            <a:srgbClr val="EEF2F1"/>
-          </a:solidFill>
-          <a:ln/>
-        </p:spPr>
-        <p:txBody>
-          <a:bodyPr wrap="square" rtlCol="0" anchor="ctr"/>
-          <a:lstStyle/>
-          <a:p>
-            <a:pPr indent="0" marL="0">
-              <a:buNone/>
-            </a:pPr>
-            <a:endParaRPr lang="en-US" dirty="0"/>
-          </a:p>
-        </p:txBody>
-      </p:sp>
-      <p:sp>
-        <p:nvSpPr>
-          <p:cNvPr id="5" name="Text 2"/>
-          <p:cNvSpPr/>
-          <p:nvPr>
-            <p:ph idx="103" type="body" hasCustomPrompt="1"/>
-          </p:nvPr>
-        </p:nvSpPr>
-        <p:spPr>
-          <a:xfrm>
-            <a:off x="886968" y="1234440"/>
-            <a:ext cx="4751680" cy="4892040"/>
-          </a:xfrm>
-          <a:prstGeom prst="rect">
-            <a:avLst/>
-          </a:prstGeom>
-          <a:noFill/>
-          <a:ln/>
-        </p:spPr>
-        <p:txBody>
-          <a:bodyPr wrap="square" rtlCol="0"/>
+          <a:ln>
+            <a:noFill/>
+          </a:ln>
+        </p:spPr>
+        <p:txBody>
+          <a:bodyPr wrap="square" rtlCol="0" lIns="274320" tIns="274320" rIns="274320" bIns="274320">
+            <a:spAutoFit/>
+          </a:bodyPr>
           <a:lstStyle>
             <a:lvl1pPr algn="l" indent="0" marL="0">
               <a:lnSpc>
-                <a:spcPct val="125000"/>
+                <a:spcPct val="135000"/>
               </a:lnSpc>
               <a:spcAft>
                 <a:spcPts val="600"/>
@@ -2377,16 +2505,16 @@
                 <a:solidFill>
                   <a:srgbClr val="0E4D49"/>
                 </a:solidFill>
-                <a:latin typeface="PP Mori" pitchFamily="34" charset="0"/>
-                <a:ea typeface="PP Mori" pitchFamily="34" charset="-122"/>
-                <a:cs typeface="PP Mori" pitchFamily="34" charset="-120"/>
+                <a:latin typeface="IBM Plex Serif" pitchFamily="34" charset="0"/>
+                <a:ea typeface="IBM Plex Serif" pitchFamily="34" charset="-122"/>
+                <a:cs typeface="IBM Plex Serif" pitchFamily="34" charset="-120"/>
               </a:defRPr>
             </a:lvl1pPr>
           </a:lstStyle>
           <a:p>
             <a:pPr algn="l" indent="0" marL="0">
               <a:lnSpc>
-                <a:spcPct val="125000"/>
+                <a:spcPct val="135000"/>
               </a:lnSpc>
               <a:spcAft>
                 <a:spcPts val="600"/>
@@ -2398,11 +2526,11 @@
                 <a:solidFill>
                   <a:srgbClr val="0E4D49"/>
                 </a:solidFill>
-                <a:latin typeface="PP Mori" pitchFamily="34" charset="0"/>
-                <a:ea typeface="PP Mori" pitchFamily="34" charset="-122"/>
-                <a:cs typeface="PP Mori" pitchFamily="34" charset="-120"/>
+                <a:latin typeface="IBM Plex Serif" pitchFamily="34" charset="0"/>
+                <a:ea typeface="IBM Plex Serif" pitchFamily="34" charset="-122"/>
+                <a:cs typeface="IBM Plex Serif" pitchFamily="34" charset="-120"/>
               </a:rPr>
-              <a:t>Text hinzufügen</a:t>
+              <a:t>Text in der Box</a:t>
             </a:r>
             <a:endParaRPr lang="en-US" sz="1200" dirty="0"/>
           </a:p>
@@ -2410,29 +2538,37 @@
       </p:sp>
       <p:sp>
         <p:nvSpPr>
-          <p:cNvPr id="6" name="Text 2"/>
+          <p:cNvPr id="5" name="Text 0"/>
           <p:cNvSpPr/>
           <p:nvPr>
-            <p:ph idx="104" type="body" hasCustomPrompt="1"/>
-          </p:nvPr>
-        </p:nvSpPr>
-        <p:spPr>
-          <a:xfrm>
-            <a:off x="6553048" y="1234440"/>
-            <a:ext cx="4751680" cy="4892040"/>
-          </a:xfrm>
-          <a:prstGeom prst="rect">
-            <a:avLst/>
-          </a:prstGeom>
-          <a:noFill/>
-          <a:ln/>
-        </p:spPr>
-        <p:txBody>
-          <a:bodyPr wrap="square" rtlCol="0"/>
+            <p:ph idx="103" type="body" hasCustomPrompt="1"/>
+          </p:nvPr>
+        </p:nvSpPr>
+        <p:spPr>
+          <a:xfrm>
+            <a:off x="6278728" y="960120"/>
+            <a:ext cx="5300320" cy="1097280"/>
+          </a:xfrm>
+          <a:prstGeom prst="roundRect">
+            <a:avLst>
+              <a:gd name="adj" fmla="val 4000"/>
+            </a:avLst>
+          </a:prstGeom>
+          <a:solidFill>
+            <a:srgbClr val="EEF2F1"/>
+          </a:solidFill>
+          <a:ln>
+            <a:noFill/>
+          </a:ln>
+        </p:spPr>
+        <p:txBody>
+          <a:bodyPr wrap="square" rtlCol="0" lIns="274320" tIns="274320" rIns="274320" bIns="274320">
+            <a:spAutoFit/>
+          </a:bodyPr>
           <a:lstStyle>
             <a:lvl1pPr algn="l" indent="0" marL="0">
               <a:lnSpc>
-                <a:spcPct val="125000"/>
+                <a:spcPct val="135000"/>
               </a:lnSpc>
               <a:spcAft>
                 <a:spcPts val="600"/>
@@ -2442,16 +2578,16 @@
                 <a:solidFill>
                   <a:srgbClr val="0E4D49"/>
                 </a:solidFill>
-                <a:latin typeface="PP Mori" pitchFamily="34" charset="0"/>
-                <a:ea typeface="PP Mori" pitchFamily="34" charset="-122"/>
-                <a:cs typeface="PP Mori" pitchFamily="34" charset="-120"/>
+                <a:latin typeface="IBM Plex Serif" pitchFamily="34" charset="0"/>
+                <a:ea typeface="IBM Plex Serif" pitchFamily="34" charset="-122"/>
+                <a:cs typeface="IBM Plex Serif" pitchFamily="34" charset="-120"/>
               </a:defRPr>
             </a:lvl1pPr>
           </a:lstStyle>
           <a:p>
             <a:pPr algn="l" indent="0" marL="0">
               <a:lnSpc>
-                <a:spcPct val="125000"/>
+                <a:spcPct val="135000"/>
               </a:lnSpc>
               <a:spcAft>
                 <a:spcPts val="600"/>
@@ -2463,11 +2599,11 @@
                 <a:solidFill>
                   <a:srgbClr val="0E4D49"/>
                 </a:solidFill>
-                <a:latin typeface="PP Mori" pitchFamily="34" charset="0"/>
-                <a:ea typeface="PP Mori" pitchFamily="34" charset="-122"/>
-                <a:cs typeface="PP Mori" pitchFamily="34" charset="-120"/>
+                <a:latin typeface="IBM Plex Serif" pitchFamily="34" charset="0"/>
+                <a:ea typeface="IBM Plex Serif" pitchFamily="34" charset="-122"/>
+                <a:cs typeface="IBM Plex Serif" pitchFamily="34" charset="-120"/>
               </a:rPr>
-              <a:t>Text hinzufügen</a:t>
+              <a:t>Text in der Box</a:t>
             </a:r>
             <a:endParaRPr lang="en-US" sz="1200" dirty="0"/>
           </a:p>
@@ -2553,12 +2689,36 @@
           <a:chExt cx="0" cy="0"/>
         </a:xfrm>
       </p:grpSpPr>
-      <p:sp>
-        <p:nvSpPr>
-          <p:cNvPr id="2" name="Text 0"/>
+      <p:pic>
+        <p:nvPicPr>
+          <p:cNvPr id="2" name="Image 0" descr="CASI">    </p:cNvPr>
+          <p:cNvPicPr>
+            <a:picLocks noChangeAspect="1"/>
+          </p:cNvPicPr>
+          <p:nvPr/>
+        </p:nvPicPr>
+        <p:blipFill>
+          <a:blip r:embed="rId1"/>
+          <a:stretch>
+            <a:fillRect/>
+          </a:stretch>
+        </p:blipFill>
+        <p:spPr>
+          <a:xfrm>
+            <a:off x="612648" y="6437376"/>
+            <a:ext cx="163982" cy="182880"/>
+          </a:xfrm>
+          <a:prstGeom prst="rect">
+            <a:avLst/>
+          </a:prstGeom>
+        </p:spPr>
+      </p:pic>
+      <p:sp>
+        <p:nvSpPr>
+          <p:cNvPr id="3" name="Text 0"/>
           <p:cNvSpPr/>
           <p:nvPr>
-            <p:ph idx="100" type="title" hasCustomPrompt="1"/>
+            <p:ph idx="101" type="title" hasCustomPrompt="1"/>
           </p:nvPr>
         </p:nvSpPr>
         <p:spPr>
@@ -2573,7 +2733,7 @@
           <a:ln/>
         </p:spPr>
         <p:txBody>
-          <a:bodyPr wrap="square" rtlCol="0"/>
+          <a:bodyPr lIns="0" tIns="0" rIns="0" bIns="0" wrap="square" rtlCol="0"/>
           <a:lstStyle>
             <a:lvl1pPr algn="l" indent="0" marL="0">
               <a:buNone/>
@@ -2608,10 +2768,10 @@
       </p:sp>
       <p:sp>
         <p:nvSpPr>
-          <p:cNvPr id="3" name="Text 0"/>
+          <p:cNvPr id="4" name="Text 0"/>
           <p:cNvSpPr/>
           <p:nvPr>
-            <p:ph idx="101" hasCustomPrompt="1"/>
+            <p:ph idx="102" hasCustomPrompt="1"/>
           </p:nvPr>
         </p:nvSpPr>
         <p:spPr>
@@ -2626,7 +2786,7 @@
           <a:ln/>
         </p:spPr>
         <p:txBody>
-          <a:bodyPr wrap="square" rtlCol="0"/>
+          <a:bodyPr lIns="0" tIns="0" rIns="0" bIns="0" wrap="square" rtlCol="0"/>
           <a:lstStyle>
             <a:lvl1pPr indent="0" marL="0">
               <a:buNone/>
@@ -2655,10 +2815,10 @@
       </p:sp>
       <p:sp>
         <p:nvSpPr>
-          <p:cNvPr id="4" name="Text 0"/>
+          <p:cNvPr id="5" name="Text 0"/>
           <p:cNvSpPr/>
           <p:nvPr>
-            <p:ph idx="102" type="body" hasCustomPrompt="1"/>
+            <p:ph idx="103" type="body" hasCustomPrompt="1"/>
           </p:nvPr>
         </p:nvSpPr>
         <p:spPr>
@@ -2673,15 +2833,12 @@
           <a:ln/>
         </p:spPr>
         <p:txBody>
-          <a:bodyPr wrap="square" rtlCol="0"/>
+          <a:bodyPr lIns="0" tIns="0" rIns="0" bIns="0" wrap="square" rtlCol="0"/>
           <a:lstStyle>
             <a:lvl1pPr algn="l" indent="0" marL="0">
               <a:lnSpc>
                 <a:spcPct val="120000"/>
               </a:lnSpc>
-              <a:spcAft>
-                <a:spcPts val="600"/>
-              </a:spcAft>
               <a:buNone/>
               <a:defRPr lang="en-US" sz="750" dirty="0">
                 <a:solidFill>
@@ -2698,9 +2855,6 @@
               <a:lnSpc>
                 <a:spcPct val="120000"/>
               </a:lnSpc>
-              <a:spcAft>
-                <a:spcPts val="600"/>
-              </a:spcAft>
               <a:buNone/>
             </a:pPr>
             <a:r>
@@ -3151,11 +3305,8 @@
           <a:p>
             <a:pPr algn="l" indent="0" marL="0">
               <a:lnSpc>
-                <a:spcPct val="125000"/>
+                <a:spcPct val="120000"/>
               </a:lnSpc>
-              <a:spcAft>
-                <a:spcPts val="600"/>
-              </a:spcAft>
               <a:buNone/>
             </a:pPr>
             <a:endParaRPr lang="en-US" sz="1000" dirty="0"/>
@@ -3220,11 +3371,8 @@
           <a:p>
             <a:pPr algn="l" indent="0" marL="0">
               <a:lnSpc>
-                <a:spcPct val="125000"/>
+                <a:spcPct val="120000"/>
               </a:lnSpc>
-              <a:spcAft>
-                <a:spcPts val="600"/>
-              </a:spcAft>
               <a:buNone/>
             </a:pPr>
             <a:endParaRPr lang="en-US" sz="1400" dirty="0"/>
@@ -3256,11 +3404,8 @@
           <a:p>
             <a:pPr algn="l" indent="0" marL="0">
               <a:lnSpc>
-                <a:spcPct val="125000"/>
+                <a:spcPct val="120000"/>
               </a:lnSpc>
-              <a:spcAft>
-                <a:spcPts val="600"/>
-              </a:spcAft>
               <a:buNone/>
             </a:pPr>
             <a:endParaRPr lang="en-US" sz="900" dirty="0"/>

--- a/vorlagen/CASI-Folien.pptx
+++ b/vorlagen/CASI-Folien.pptx
@@ -650,7 +650,7 @@
         <p:spPr>
           <a:xfrm>
             <a:off x="612648" y="493776"/>
-            <a:ext cx="450952" cy="502920"/>
+            <a:ext cx="448856" cy="502920"/>
           </a:xfrm>
           <a:prstGeom prst="rect">
             <a:avLst/>
@@ -824,7 +824,7 @@
         <p:spPr>
           <a:xfrm>
             <a:off x="612648" y="6437376"/>
-            <a:ext cx="163982" cy="182880"/>
+            <a:ext cx="163220" cy="182880"/>
           </a:xfrm>
           <a:prstGeom prst="rect">
             <a:avLst/>
@@ -928,7 +928,7 @@
         <p:spPr>
           <a:xfrm>
             <a:off x="612648" y="493776"/>
-            <a:ext cx="450952" cy="502920"/>
+            <a:ext cx="448856" cy="502920"/>
           </a:xfrm>
           <a:prstGeom prst="rect">
             <a:avLst/>
@@ -1220,7 +1220,7 @@
         <p:spPr>
           <a:xfrm>
             <a:off x="612648" y="6437376"/>
-            <a:ext cx="163982" cy="182880"/>
+            <a:ext cx="163220" cy="182880"/>
           </a:xfrm>
           <a:prstGeom prst="rect">
             <a:avLst/>
@@ -1442,7 +1442,7 @@
         <p:spPr>
           <a:xfrm>
             <a:off x="612648" y="6437376"/>
-            <a:ext cx="163982" cy="182880"/>
+            <a:ext cx="163220" cy="182880"/>
           </a:xfrm>
           <a:prstGeom prst="rect">
             <a:avLst/>
@@ -1664,7 +1664,7 @@
         <p:spPr>
           <a:xfrm>
             <a:off x="612648" y="6437376"/>
-            <a:ext cx="163982" cy="182880"/>
+            <a:ext cx="163220" cy="182880"/>
           </a:xfrm>
           <a:prstGeom prst="rect">
             <a:avLst/>
@@ -1821,7 +1821,7 @@
         <p:spPr>
           <a:xfrm>
             <a:off x="612648" y="6437376"/>
-            <a:ext cx="163982" cy="182880"/>
+            <a:ext cx="163220" cy="182880"/>
           </a:xfrm>
           <a:prstGeom prst="rect">
             <a:avLst/>
@@ -2108,7 +2108,7 @@
         <p:spPr>
           <a:xfrm>
             <a:off x="612648" y="6437376"/>
-            <a:ext cx="163982" cy="182880"/>
+            <a:ext cx="163220" cy="182880"/>
           </a:xfrm>
           <a:prstGeom prst="rect">
             <a:avLst/>
@@ -2403,7 +2403,7 @@
         <p:spPr>
           <a:xfrm>
             <a:off x="612648" y="6437376"/>
-            <a:ext cx="163982" cy="182880"/>
+            <a:ext cx="163220" cy="182880"/>
           </a:xfrm>
           <a:prstGeom prst="rect">
             <a:avLst/>
@@ -2706,7 +2706,7 @@
         <p:spPr>
           <a:xfrm>
             <a:off x="612648" y="6437376"/>
-            <a:ext cx="163982" cy="182880"/>
+            <a:ext cx="163220" cy="182880"/>
           </a:xfrm>
           <a:prstGeom prst="rect">
             <a:avLst/>
@@ -3707,6 +3707,68 @@
   </a:themeElements>
   <a:objectDefaults/>
   <a:extraClrSchemeLst/>
+  <a:custClrLst>
+    <a:custClr name="ICCA">
+      <a:srgbClr val="13917C"/>
+    </a:custClr>
+    <a:custClr name="ICCA Grafik">
+      <a:srgbClr val="1A9C7E"/>
+    </a:custClr>
+    <a:custClr name="Burgundy hell">
+      <a:srgbClr val="F6EBEF"/>
+    </a:custClr>
+    <a:custClr name="Burgundy mittel">
+      <a:srgbClr val="CB96A6"/>
+    </a:custClr>
+    <a:custClr name="Kette direct">
+      <a:srgbClr val="29363D"/>
+    </a:custClr>
+    <a:custClr name="Kette iron">
+      <a:srgbClr val="8C5A3C"/>
+    </a:custClr>
+    <a:custClr name="Kette steel">
+      <a:srgbClr val="5B7C99"/>
+    </a:custClr>
+    <a:custClr name="Kette car">
+      <a:srgbClr val="3F6B3F"/>
+    </a:custClr>
+    <a:custClr name="Kette body">
+      <a:srgbClr val="0E8388"/>
+    </a:custClr>
+    <a:custClr name="Kette Lebensende">
+      <a:srgbClr val="6B4C6E"/>
+    </a:custClr>
+    <a:custClr name="Daten A">
+      <a:srgbClr val="B060E0"/>
+    </a:custClr>
+    <a:custClr name="Daten B">
+      <a:srgbClr val="3060C0"/>
+    </a:custClr>
+    <a:custClr name="Daten C">
+      <a:srgbClr val="2080B0"/>
+    </a:custClr>
+    <a:custClr name="Daten D">
+      <a:srgbClr val="50B0D0"/>
+    </a:custClr>
+    <a:custClr name="Daten E">
+      <a:srgbClr val="20C090"/>
+    </a:custClr>
+    <a:custClr name="Daten F">
+      <a:srgbClr val="30A060"/>
+    </a:custClr>
+    <a:custClr name="Daten G">
+      <a:srgbClr val="E08820"/>
+    </a:custClr>
+    <a:custClr name="Daten H">
+      <a:srgbClr val="D06020"/>
+    </a:custClr>
+    <a:custClr name="Daten I">
+      <a:srgbClr val="E04040"/>
+    </a:custClr>
+    <a:custClr name="Daten J">
+      <a:srgbClr val="C04080"/>
+    </a:custClr>
+  </a:custClrLst>
   <a:extLst>
     <a:ext uri="{05A4C25C-085E-4340-85A3-A5531E510DB2}">
       <thm15:themeFamily xmlns:thm15="http://schemas.microsoft.com/office/thememl/2012/main" name="Office Theme" id="{62F939B6-93AF-4DB8-9C6B-D6C7DFDC589F}" vid="{4A3C46E8-61CC-4603-A589-7422A47A8E4A}"/>

--- a/vorlagen/CASI-Folien.pptx
+++ b/vorlagen/CASI-Folien.pptx
@@ -807,30 +807,6 @@
           <a:chExt cx="0" cy="0"/>
         </a:xfrm>
       </p:grpSpPr>
-      <p:pic>
-        <p:nvPicPr>
-          <p:cNvPr id="2" name="Image 0" descr="CASI">    </p:cNvPr>
-          <p:cNvPicPr>
-            <a:picLocks noChangeAspect="1"/>
-          </p:cNvPicPr>
-          <p:nvPr/>
-        </p:nvPicPr>
-        <p:blipFill>
-          <a:blip r:embed="rId1"/>
-          <a:stretch>
-            <a:fillRect/>
-          </a:stretch>
-        </p:blipFill>
-        <p:spPr>
-          <a:xfrm>
-            <a:off x="612648" y="6437376"/>
-            <a:ext cx="163220" cy="182880"/>
-          </a:xfrm>
-          <a:prstGeom prst="rect">
-            <a:avLst/>
-          </a:prstGeom>
-        </p:spPr>
-      </p:pic>
       <p:sp>
         <p:nvSpPr>
           <p:cNvPr id="25" name="Slide Number Placeholder 0"/>
@@ -1203,36 +1179,12 @@
           <a:chExt cx="0" cy="0"/>
         </a:xfrm>
       </p:grpSpPr>
-      <p:pic>
-        <p:nvPicPr>
-          <p:cNvPr id="2" name="Image 0" descr="CASI">    </p:cNvPr>
-          <p:cNvPicPr>
-            <a:picLocks noChangeAspect="1"/>
-          </p:cNvPicPr>
-          <p:nvPr/>
-        </p:nvPicPr>
-        <p:blipFill>
-          <a:blip r:embed="rId1"/>
-          <a:stretch>
-            <a:fillRect/>
-          </a:stretch>
-        </p:blipFill>
-        <p:spPr>
-          <a:xfrm>
-            <a:off x="612648" y="6437376"/>
-            <a:ext cx="163220" cy="182880"/>
-          </a:xfrm>
-          <a:prstGeom prst="rect">
-            <a:avLst/>
-          </a:prstGeom>
-        </p:spPr>
-      </p:pic>
-      <p:sp>
-        <p:nvSpPr>
-          <p:cNvPr id="3" name="Text 0"/>
+      <p:sp>
+        <p:nvSpPr>
+          <p:cNvPr id="2" name="Text 0"/>
           <p:cNvSpPr/>
           <p:nvPr>
-            <p:ph idx="101" type="body" hasCustomPrompt="1"/>
+            <p:ph idx="100" type="body" hasCustomPrompt="1"/>
           </p:nvPr>
         </p:nvSpPr>
         <p:spPr>
@@ -1288,10 +1240,10 @@
       </p:sp>
       <p:sp>
         <p:nvSpPr>
-          <p:cNvPr id="4" name="Text 0"/>
+          <p:cNvPr id="3" name="Text 0"/>
           <p:cNvSpPr/>
           <p:nvPr>
-            <p:ph idx="102" type="title" hasCustomPrompt="1"/>
+            <p:ph idx="101" type="title" hasCustomPrompt="1"/>
           </p:nvPr>
         </p:nvSpPr>
         <p:spPr>
@@ -1425,36 +1377,12 @@
           <a:chExt cx="0" cy="0"/>
         </a:xfrm>
       </p:grpSpPr>
-      <p:pic>
-        <p:nvPicPr>
-          <p:cNvPr id="2" name="Image 0" descr="CASI">    </p:cNvPr>
-          <p:cNvPicPr>
-            <a:picLocks noChangeAspect="1"/>
-          </p:cNvPicPr>
-          <p:nvPr/>
-        </p:nvPicPr>
-        <p:blipFill>
-          <a:blip r:embed="rId1"/>
-          <a:stretch>
-            <a:fillRect/>
-          </a:stretch>
-        </p:blipFill>
-        <p:spPr>
-          <a:xfrm>
-            <a:off x="612648" y="6437376"/>
-            <a:ext cx="163220" cy="182880"/>
-          </a:xfrm>
-          <a:prstGeom prst="rect">
-            <a:avLst/>
-          </a:prstGeom>
-        </p:spPr>
-      </p:pic>
-      <p:sp>
-        <p:nvSpPr>
-          <p:cNvPr id="3" name="Text 0"/>
+      <p:sp>
+        <p:nvSpPr>
+          <p:cNvPr id="2" name="Text 0"/>
           <p:cNvSpPr/>
           <p:nvPr>
-            <p:ph idx="101" type="title" hasCustomPrompt="1"/>
+            <p:ph idx="100" type="title" hasCustomPrompt="1"/>
           </p:nvPr>
         </p:nvSpPr>
         <p:spPr>
@@ -1504,10 +1432,10 @@
       </p:sp>
       <p:sp>
         <p:nvSpPr>
-          <p:cNvPr id="4" name="Text 0"/>
+          <p:cNvPr id="3" name="Text 0"/>
           <p:cNvSpPr/>
           <p:nvPr>
-            <p:ph idx="102" type="body" hasCustomPrompt="1"/>
+            <p:ph idx="101" type="body" hasCustomPrompt="1"/>
           </p:nvPr>
         </p:nvSpPr>
         <p:spPr>
@@ -1647,36 +1575,12 @@
           <a:chExt cx="0" cy="0"/>
         </a:xfrm>
       </p:grpSpPr>
-      <p:pic>
-        <p:nvPicPr>
-          <p:cNvPr id="2" name="Image 0" descr="CASI">    </p:cNvPr>
-          <p:cNvPicPr>
-            <a:picLocks noChangeAspect="1"/>
-          </p:cNvPicPr>
-          <p:nvPr/>
-        </p:nvPicPr>
-        <p:blipFill>
-          <a:blip r:embed="rId1"/>
-          <a:stretch>
-            <a:fillRect/>
-          </a:stretch>
-        </p:blipFill>
-        <p:spPr>
-          <a:xfrm>
-            <a:off x="612648" y="6437376"/>
-            <a:ext cx="163220" cy="182880"/>
-          </a:xfrm>
-          <a:prstGeom prst="rect">
-            <a:avLst/>
-          </a:prstGeom>
-        </p:spPr>
-      </p:pic>
-      <p:sp>
-        <p:nvSpPr>
-          <p:cNvPr id="3" name="Text 0"/>
+      <p:sp>
+        <p:nvSpPr>
+          <p:cNvPr id="2" name="Text 0"/>
           <p:cNvSpPr/>
           <p:nvPr>
-            <p:ph idx="101" type="title" hasCustomPrompt="1"/>
+            <p:ph idx="100" type="title" hasCustomPrompt="1"/>
           </p:nvPr>
         </p:nvSpPr>
         <p:spPr>
@@ -1804,36 +1708,12 @@
           <a:chExt cx="0" cy="0"/>
         </a:xfrm>
       </p:grpSpPr>
-      <p:pic>
-        <p:nvPicPr>
-          <p:cNvPr id="2" name="Image 0" descr="CASI">    </p:cNvPr>
-          <p:cNvPicPr>
-            <a:picLocks noChangeAspect="1"/>
-          </p:cNvPicPr>
-          <p:nvPr/>
-        </p:nvPicPr>
-        <p:blipFill>
-          <a:blip r:embed="rId1"/>
-          <a:stretch>
-            <a:fillRect/>
-          </a:stretch>
-        </p:blipFill>
-        <p:spPr>
-          <a:xfrm>
-            <a:off x="612648" y="6437376"/>
-            <a:ext cx="163220" cy="182880"/>
-          </a:xfrm>
-          <a:prstGeom prst="rect">
-            <a:avLst/>
-          </a:prstGeom>
-        </p:spPr>
-      </p:pic>
-      <p:sp>
-        <p:nvSpPr>
-          <p:cNvPr id="3" name="Text 0"/>
+      <p:sp>
+        <p:nvSpPr>
+          <p:cNvPr id="2" name="Text 0"/>
           <p:cNvSpPr/>
           <p:nvPr>
-            <p:ph idx="101" type="title" hasCustomPrompt="1"/>
+            <p:ph idx="100" type="title" hasCustomPrompt="1"/>
           </p:nvPr>
         </p:nvSpPr>
         <p:spPr>
@@ -1883,10 +1763,10 @@
       </p:sp>
       <p:sp>
         <p:nvSpPr>
-          <p:cNvPr id="4" name="Text 0"/>
+          <p:cNvPr id="3" name="Text 0"/>
           <p:cNvSpPr/>
           <p:nvPr>
-            <p:ph idx="102" type="body" hasCustomPrompt="1"/>
+            <p:ph idx="101" type="body" hasCustomPrompt="1"/>
           </p:nvPr>
         </p:nvSpPr>
         <p:spPr>
@@ -1948,10 +1828,10 @@
       </p:sp>
       <p:sp>
         <p:nvSpPr>
-          <p:cNvPr id="5" name="Text 0"/>
+          <p:cNvPr id="4" name="Text 0"/>
           <p:cNvSpPr/>
           <p:nvPr>
-            <p:ph idx="103" type="body" hasCustomPrompt="1"/>
+            <p:ph idx="102" type="body" hasCustomPrompt="1"/>
           </p:nvPr>
         </p:nvSpPr>
         <p:spPr>
@@ -2091,36 +1971,12 @@
           <a:chExt cx="0" cy="0"/>
         </a:xfrm>
       </p:grpSpPr>
-      <p:pic>
-        <p:nvPicPr>
-          <p:cNvPr id="2" name="Image 0" descr="CASI">    </p:cNvPr>
-          <p:cNvPicPr>
-            <a:picLocks noChangeAspect="1"/>
-          </p:cNvPicPr>
-          <p:nvPr/>
-        </p:nvPicPr>
-        <p:blipFill>
-          <a:blip r:embed="rId1"/>
-          <a:stretch>
-            <a:fillRect/>
-          </a:stretch>
-        </p:blipFill>
-        <p:spPr>
-          <a:xfrm>
-            <a:off x="612648" y="6437376"/>
-            <a:ext cx="163220" cy="182880"/>
-          </a:xfrm>
-          <a:prstGeom prst="rect">
-            <a:avLst/>
-          </a:prstGeom>
-        </p:spPr>
-      </p:pic>
-      <p:sp>
-        <p:nvSpPr>
-          <p:cNvPr id="3" name="Text 0"/>
+      <p:sp>
+        <p:nvSpPr>
+          <p:cNvPr id="2" name="Text 0"/>
           <p:cNvSpPr/>
           <p:nvPr>
-            <p:ph idx="101" type="title" hasCustomPrompt="1"/>
+            <p:ph idx="100" type="title" hasCustomPrompt="1"/>
           </p:nvPr>
         </p:nvSpPr>
         <p:spPr>
@@ -2170,10 +2026,10 @@
       </p:sp>
       <p:sp>
         <p:nvSpPr>
-          <p:cNvPr id="4" name="Text 0"/>
+          <p:cNvPr id="3" name="Text 0"/>
           <p:cNvSpPr/>
           <p:nvPr>
-            <p:ph idx="102" type="body" hasCustomPrompt="1"/>
+            <p:ph idx="101" type="body" hasCustomPrompt="1"/>
           </p:nvPr>
         </p:nvSpPr>
         <p:spPr>
@@ -2235,10 +2091,10 @@
       </p:sp>
       <p:sp>
         <p:nvSpPr>
-          <p:cNvPr id="5" name="Text 0"/>
+          <p:cNvPr id="4" name="Text 0"/>
           <p:cNvSpPr/>
           <p:nvPr>
-            <p:ph idx="103" type="body" hasCustomPrompt="1"/>
+            <p:ph idx="102" type="body" hasCustomPrompt="1"/>
           </p:nvPr>
         </p:nvSpPr>
         <p:spPr>
@@ -2386,36 +2242,12 @@
           <a:chExt cx="0" cy="0"/>
         </a:xfrm>
       </p:grpSpPr>
-      <p:pic>
-        <p:nvPicPr>
-          <p:cNvPr id="2" name="Image 0" descr="CASI">    </p:cNvPr>
-          <p:cNvPicPr>
-            <a:picLocks noChangeAspect="1"/>
-          </p:cNvPicPr>
-          <p:nvPr/>
-        </p:nvPicPr>
-        <p:blipFill>
-          <a:blip r:embed="rId1"/>
-          <a:stretch>
-            <a:fillRect/>
-          </a:stretch>
-        </p:blipFill>
-        <p:spPr>
-          <a:xfrm>
-            <a:off x="612648" y="6437376"/>
-            <a:ext cx="163220" cy="182880"/>
-          </a:xfrm>
-          <a:prstGeom prst="rect">
-            <a:avLst/>
-          </a:prstGeom>
-        </p:spPr>
-      </p:pic>
-      <p:sp>
-        <p:nvSpPr>
-          <p:cNvPr id="3" name="Text 0"/>
+      <p:sp>
+        <p:nvSpPr>
+          <p:cNvPr id="2" name="Text 0"/>
           <p:cNvSpPr/>
           <p:nvPr>
-            <p:ph idx="101" type="title" hasCustomPrompt="1"/>
+            <p:ph idx="100" type="title" hasCustomPrompt="1"/>
           </p:nvPr>
         </p:nvSpPr>
         <p:spPr>
@@ -2465,10 +2297,10 @@
       </p:sp>
       <p:sp>
         <p:nvSpPr>
-          <p:cNvPr id="4" name="Text 0"/>
+          <p:cNvPr id="3" name="Text 0"/>
           <p:cNvSpPr/>
           <p:nvPr>
-            <p:ph idx="102" type="body" hasCustomPrompt="1"/>
+            <p:ph idx="101" type="body" hasCustomPrompt="1"/>
           </p:nvPr>
         </p:nvSpPr>
         <p:spPr>
@@ -2538,10 +2370,10 @@
       </p:sp>
       <p:sp>
         <p:nvSpPr>
-          <p:cNvPr id="5" name="Text 0"/>
+          <p:cNvPr id="4" name="Text 0"/>
           <p:cNvSpPr/>
           <p:nvPr>
-            <p:ph idx="103" type="body" hasCustomPrompt="1"/>
+            <p:ph idx="102" type="body" hasCustomPrompt="1"/>
           </p:nvPr>
         </p:nvSpPr>
         <p:spPr>
@@ -2689,36 +2521,12 @@
           <a:chExt cx="0" cy="0"/>
         </a:xfrm>
       </p:grpSpPr>
-      <p:pic>
-        <p:nvPicPr>
-          <p:cNvPr id="2" name="Image 0" descr="CASI">    </p:cNvPr>
-          <p:cNvPicPr>
-            <a:picLocks noChangeAspect="1"/>
-          </p:cNvPicPr>
-          <p:nvPr/>
-        </p:nvPicPr>
-        <p:blipFill>
-          <a:blip r:embed="rId1"/>
-          <a:stretch>
-            <a:fillRect/>
-          </a:stretch>
-        </p:blipFill>
-        <p:spPr>
-          <a:xfrm>
-            <a:off x="612648" y="6437376"/>
-            <a:ext cx="163220" cy="182880"/>
-          </a:xfrm>
-          <a:prstGeom prst="rect">
-            <a:avLst/>
-          </a:prstGeom>
-        </p:spPr>
-      </p:pic>
-      <p:sp>
-        <p:nvSpPr>
-          <p:cNvPr id="3" name="Text 0"/>
+      <p:sp>
+        <p:nvSpPr>
+          <p:cNvPr id="2" name="Text 0"/>
           <p:cNvSpPr/>
           <p:nvPr>
-            <p:ph idx="101" type="title" hasCustomPrompt="1"/>
+            <p:ph idx="100" type="title" hasCustomPrompt="1"/>
           </p:nvPr>
         </p:nvSpPr>
         <p:spPr>
@@ -2768,10 +2576,10 @@
       </p:sp>
       <p:sp>
         <p:nvSpPr>
-          <p:cNvPr id="4" name="Text 0"/>
+          <p:cNvPr id="3" name="Text 0"/>
           <p:cNvSpPr/>
           <p:nvPr>
-            <p:ph idx="102" hasCustomPrompt="1"/>
+            <p:ph idx="101" hasCustomPrompt="1"/>
           </p:nvPr>
         </p:nvSpPr>
         <p:spPr>
@@ -2815,10 +2623,10 @@
       </p:sp>
       <p:sp>
         <p:nvSpPr>
-          <p:cNvPr id="5" name="Text 0"/>
+          <p:cNvPr id="4" name="Text 0"/>
           <p:cNvSpPr/>
           <p:nvPr>
-            <p:ph idx="103" type="body" hasCustomPrompt="1"/>
+            <p:ph idx="102" type="body" hasCustomPrompt="1"/>
           </p:nvPr>
         </p:nvSpPr>
         <p:spPr>

--- a/vorlagen/CASI-Folien.pptx
+++ b/vorlagen/CASI-Folien.pptx
@@ -2100,11 +2100,11 @@
         <p:spPr>
           <a:xfrm>
             <a:off x="7738567" y="960120"/>
-            <a:ext cx="3840480" cy="1097280"/>
+            <a:ext cx="3840480" cy="795528"/>
           </a:xfrm>
           <a:prstGeom prst="roundRect">
             <a:avLst>
-              <a:gd name="adj" fmla="val 4000"/>
+              <a:gd name="adj" fmla="val 11494"/>
             </a:avLst>
           </a:prstGeom>
           <a:solidFill>
@@ -2306,11 +2306,11 @@
         <p:spPr>
           <a:xfrm>
             <a:off x="612648" y="960120"/>
-            <a:ext cx="5300320" cy="1097280"/>
+            <a:ext cx="5300320" cy="795528"/>
           </a:xfrm>
           <a:prstGeom prst="roundRect">
             <a:avLst>
-              <a:gd name="adj" fmla="val 4000"/>
+              <a:gd name="adj" fmla="val 11494"/>
             </a:avLst>
           </a:prstGeom>
           <a:solidFill>
@@ -2379,11 +2379,11 @@
         <p:spPr>
           <a:xfrm>
             <a:off x="6278728" y="960120"/>
-            <a:ext cx="5300320" cy="1097280"/>
+            <a:ext cx="5300320" cy="795528"/>
           </a:xfrm>
           <a:prstGeom prst="roundRect">
             <a:avLst>
-              <a:gd name="adj" fmla="val 4000"/>
+              <a:gd name="adj" fmla="val 11494"/>
             </a:avLst>
           </a:prstGeom>
           <a:solidFill>

--- a/vorlagen/CASI-Folien.pptx
+++ b/vorlagen/CASI-Folien.pptx
@@ -3528,23 +3528,29 @@
     <a:custClr name="Burgundy mittel">
       <a:srgbClr val="CB96A6"/>
     </a:custClr>
-    <a:custClr name="Kette direct">
+    <a:custClr name="Kette iron">
+      <a:srgbClr val="A75F26"/>
+    </a:custClr>
+    <a:custClr name="Kette steel">
+      <a:srgbClr val="1A6685"/>
+    </a:custClr>
+    <a:custClr name="Kette body">
+      <a:srgbClr val="17876F"/>
+    </a:custClr>
+    <a:custClr name="Kette car">
+      <a:srgbClr val="2A7A4B"/>
+    </a:custClr>
+    <a:custClr name="Kette Lebensende">
+      <a:srgbClr val="85499E"/>
+    </a:custClr>
+    <a:custClr name="Grafik Tinte">
       <a:srgbClr val="29363D"/>
     </a:custClr>
-    <a:custClr name="Kette iron">
-      <a:srgbClr val="8C5A3C"/>
+    <a:custClr name="Grafik leise">
+      <a:srgbClr val="54626A"/>
     </a:custClr>
-    <a:custClr name="Kette steel">
-      <a:srgbClr val="5B7C99"/>
-    </a:custClr>
-    <a:custClr name="Kette car">
-      <a:srgbClr val="3F6B3F"/>
-    </a:custClr>
-    <a:custClr name="Kette body">
-      <a:srgbClr val="0E8388"/>
-    </a:custClr>
-    <a:custClr name="Kette Lebensende">
-      <a:srgbClr val="6B4C6E"/>
+    <a:custClr name="Burgundy Rand">
+      <a:srgbClr val="E3C2CD"/>
     </a:custClr>
     <a:custClr name="Daten A">
       <a:srgbClr val="B060E0"/>
